--- a/slides/Week2.pptx
+++ b/slides/Week2.pptx
@@ -214,7 +214,7 @@
 <file path=ppt/revisionInfo.xml><?xml version="1.0" encoding="utf-8"?>
 <p1510:revInfo xmlns:a="http://schemas.openxmlformats.org/drawingml/2006/main" xmlns:r="http://schemas.openxmlformats.org/officeDocument/2006/relationships" xmlns:p1510="http://schemas.microsoft.com/office/powerpoint/2015/10/main">
   <p1510:revLst>
-    <p1510:client id="{47DB5FC0-FDB4-4D8B-84CA-4DF87D1EC7D5}" v="704" dt="2026-01-20T01:02:38.773"/>
+    <p1510:client id="{47DB5FC0-FDB4-4D8B-84CA-4DF87D1EC7D5}" v="705" dt="2026-01-20T01:30:38.326"/>
   </p1510:revLst>
 </p1510:revInfo>
 </file>
@@ -224,7 +224,7 @@
   <pc:docChgLst>
     <pc:chgData name="Zhao Jin" userId="cd05a825-544c-438a-9ba1-08e63db50b47" providerId="ADAL" clId="{5DF3A229-1965-414E-AF54-F4C37AC7DF68}"/>
     <pc:docChg chg="undo custSel addSld delSld modSld sldOrd">
-      <pc:chgData name="Zhao Jin" userId="cd05a825-544c-438a-9ba1-08e63db50b47" providerId="ADAL" clId="{5DF3A229-1965-414E-AF54-F4C37AC7DF68}" dt="2026-01-20T01:03:47.277" v="1939" actId="207"/>
+      <pc:chgData name="Zhao Jin" userId="cd05a825-544c-438a-9ba1-08e63db50b47" providerId="ADAL" clId="{5DF3A229-1965-414E-AF54-F4C37AC7DF68}" dt="2026-01-20T01:31:24.905" v="2125" actId="20577"/>
       <pc:docMkLst>
         <pc:docMk/>
       </pc:docMkLst>
@@ -321,13 +321,13 @@
         </pc:spChg>
       </pc:sldChg>
       <pc:sldChg chg="modSp mod">
-        <pc:chgData name="Zhao Jin" userId="cd05a825-544c-438a-9ba1-08e63db50b47" providerId="ADAL" clId="{5DF3A229-1965-414E-AF54-F4C37AC7DF68}" dt="2026-01-19T07:43:34.569" v="631" actId="20577"/>
+        <pc:chgData name="Zhao Jin" userId="cd05a825-544c-438a-9ba1-08e63db50b47" providerId="ADAL" clId="{5DF3A229-1965-414E-AF54-F4C37AC7DF68}" dt="2026-01-20T01:30:34.842" v="2090" actId="6549"/>
         <pc:sldMkLst>
           <pc:docMk/>
           <pc:sldMk cId="1067695719" sldId="526"/>
         </pc:sldMkLst>
         <pc:spChg chg="mod">
-          <ac:chgData name="Zhao Jin" userId="cd05a825-544c-438a-9ba1-08e63db50b47" providerId="ADAL" clId="{5DF3A229-1965-414E-AF54-F4C37AC7DF68}" dt="2026-01-19T07:43:34.569" v="631" actId="20577"/>
+          <ac:chgData name="Zhao Jin" userId="cd05a825-544c-438a-9ba1-08e63db50b47" providerId="ADAL" clId="{5DF3A229-1965-414E-AF54-F4C37AC7DF68}" dt="2026-01-20T01:30:34.842" v="2090" actId="6549"/>
           <ac:spMkLst>
             <pc:docMk/>
             <pc:sldMk cId="1067695719" sldId="526"/>
@@ -646,13 +646,13 @@
         </pc:graphicFrameChg>
       </pc:sldChg>
       <pc:sldChg chg="modSp add mod ord">
-        <pc:chgData name="Zhao Jin" userId="cd05a825-544c-438a-9ba1-08e63db50b47" providerId="ADAL" clId="{5DF3A229-1965-414E-AF54-F4C37AC7DF68}" dt="2026-01-19T07:40:53.890" v="562" actId="207"/>
+        <pc:chgData name="Zhao Jin" userId="cd05a825-544c-438a-9ba1-08e63db50b47" providerId="ADAL" clId="{5DF3A229-1965-414E-AF54-F4C37AC7DF68}" dt="2026-01-20T01:31:24.905" v="2125" actId="20577"/>
         <pc:sldMkLst>
           <pc:docMk/>
           <pc:sldMk cId="1955926907" sldId="555"/>
         </pc:sldMkLst>
         <pc:spChg chg="mod">
-          <ac:chgData name="Zhao Jin" userId="cd05a825-544c-438a-9ba1-08e63db50b47" providerId="ADAL" clId="{5DF3A229-1965-414E-AF54-F4C37AC7DF68}" dt="2026-01-19T07:40:53.890" v="562" actId="207"/>
+          <ac:chgData name="Zhao Jin" userId="cd05a825-544c-438a-9ba1-08e63db50b47" providerId="ADAL" clId="{5DF3A229-1965-414E-AF54-F4C37AC7DF68}" dt="2026-01-20T01:31:24.905" v="2125" actId="20577"/>
           <ac:spMkLst>
             <pc:docMk/>
             <pc:sldMk cId="1955926907" sldId="555"/>
@@ -30173,11 +30173,11 @@
               <a:buChar char="n"/>
             </a:pPr>
             <a:r>
-              <a:rPr lang="en-US" sz="2400" dirty="0"/>
+              <a:rPr lang="en-US" sz="2000" dirty="0"/>
               <a:t>Lecture 2 (due </a:t>
             </a:r>
             <a:r>
-              <a:rPr lang="en-US" sz="2400" dirty="0">
+              <a:rPr lang="en-US" sz="2000" dirty="0">
                 <a:solidFill>
                   <a:srgbClr val="0000FF"/>
                 </a:solidFill>
@@ -30185,7 +30185,7 @@
               <a:t>27 Jan, 2pm</a:t>
             </a:r>
             <a:r>
-              <a:rPr lang="en-US" sz="2400" dirty="0"/>
+              <a:rPr lang="en-US" sz="2000" dirty="0"/>
               <a:t>)</a:t>
             </a:r>
           </a:p>
@@ -30205,11 +30205,11 @@
               <a:buChar char="n"/>
             </a:pPr>
             <a:r>
-              <a:rPr lang="en-US" sz="2400" dirty="0"/>
+              <a:rPr lang="en-US" sz="2000" dirty="0"/>
               <a:t>Programming Environment (due </a:t>
             </a:r>
             <a:r>
-              <a:rPr lang="en-US" sz="2400" dirty="0">
+              <a:rPr lang="en-US" sz="2000" dirty="0">
                 <a:solidFill>
                   <a:srgbClr val="0000FF"/>
                 </a:solidFill>
@@ -30217,7 +30217,7 @@
               <a:t>27 Jan, 2pm</a:t>
             </a:r>
             <a:r>
-              <a:rPr lang="en-US" sz="2400" dirty="0"/>
+              <a:rPr lang="en-US" sz="2000" dirty="0"/>
               <a:t>)</a:t>
             </a:r>
           </a:p>
@@ -30237,11 +30237,11 @@
               <a:buChar char="n"/>
             </a:pPr>
             <a:r>
-              <a:rPr lang="en-US" sz="2400" dirty="0"/>
+              <a:rPr lang="en-US" sz="2000" dirty="0"/>
               <a:t>Vim (due </a:t>
             </a:r>
             <a:r>
-              <a:rPr lang="en-US" sz="2400" dirty="0">
+              <a:rPr lang="en-US" sz="2000" dirty="0">
                 <a:solidFill>
                   <a:srgbClr val="0000FF"/>
                 </a:solidFill>
@@ -30249,7 +30249,7 @@
               <a:t>3 Feb, 2pm</a:t>
             </a:r>
             <a:r>
-              <a:rPr lang="en-US" sz="2400" dirty="0"/>
+              <a:rPr lang="en-US" sz="2000" dirty="0"/>
               <a:t>)</a:t>
             </a:r>
           </a:p>
@@ -30268,7 +30268,7 @@
               <a:buFont typeface="Wingdings" pitchFamily="2" charset="2"/>
               <a:buChar char="n"/>
             </a:pPr>
-            <a:endParaRPr lang="en-US" sz="2400" dirty="0"/>
+            <a:endParaRPr lang="en-US" sz="1200" dirty="0"/>
           </a:p>
           <a:p>
             <a:pPr marL="342900" indent="-342900">
@@ -30306,9 +30306,171 @@
               <a:buChar char="n"/>
             </a:pPr>
             <a:r>
+              <a:rPr lang="en-US" sz="2000" dirty="0"/>
+              <a:t>To be discussed in the forum / tutorial</a:t>
+            </a:r>
+          </a:p>
+          <a:p>
+            <a:pPr marL="800100" lvl="1" indent="-342900">
+              <a:spcBef>
+                <a:spcPts val="1200"/>
+              </a:spcBef>
+              <a:buClr>
+                <a:schemeClr val="accent4">
+                  <a:lumMod val="60000"/>
+                  <a:lumOff val="40000"/>
+                </a:schemeClr>
+              </a:buClr>
+              <a:buSzPct val="75000"/>
+              <a:buFont typeface="Wingdings" pitchFamily="2" charset="2"/>
+              <a:buChar char="n"/>
+            </a:pPr>
+            <a:endParaRPr lang="en-US" sz="1200" dirty="0"/>
+          </a:p>
+          <a:p>
+            <a:pPr marL="342900" indent="-342900">
+              <a:spcBef>
+                <a:spcPts val="600"/>
+              </a:spcBef>
+              <a:buClr>
+                <a:schemeClr val="accent4">
+                  <a:lumMod val="60000"/>
+                  <a:lumOff val="40000"/>
+                </a:schemeClr>
+              </a:buClr>
+              <a:buSzPct val="75000"/>
+              <a:buFont typeface="Wingdings" pitchFamily="2" charset="2"/>
+              <a:buChar char="n"/>
+            </a:pPr>
+            <a:r>
               <a:rPr lang="en-US" sz="2400" dirty="0"/>
-              <a:t>To be discussed in the forum / tutorial</a:t>
-            </a:r>
+              <a:t>Programming environment</a:t>
+            </a:r>
+          </a:p>
+          <a:p>
+            <a:pPr marL="342900" indent="-342900">
+              <a:spcBef>
+                <a:spcPts val="600"/>
+              </a:spcBef>
+              <a:buClr>
+                <a:schemeClr val="accent4">
+                  <a:lumMod val="60000"/>
+                  <a:lumOff val="40000"/>
+                </a:schemeClr>
+              </a:buClr>
+              <a:buSzPct val="75000"/>
+              <a:buFont typeface="Wingdings" pitchFamily="2" charset="2"/>
+              <a:buChar char="n"/>
+            </a:pPr>
+            <a:endParaRPr lang="en-US" sz="1200" dirty="0"/>
+          </a:p>
+          <a:p>
+            <a:pPr marL="342900" indent="-342900">
+              <a:spcBef>
+                <a:spcPts val="600"/>
+              </a:spcBef>
+              <a:buClr>
+                <a:schemeClr val="accent4">
+                  <a:lumMod val="60000"/>
+                  <a:lumOff val="40000"/>
+                </a:schemeClr>
+              </a:buClr>
+              <a:buSzPct val="75000"/>
+              <a:buFont typeface="Wingdings" pitchFamily="2" charset="2"/>
+              <a:buChar char="n"/>
+            </a:pPr>
+            <a:r>
+              <a:rPr lang="en-US" sz="2400" dirty="0"/>
+              <a:t>Submission of </a:t>
+            </a:r>
+            <a:r>
+              <a:rPr lang="en-US" sz="2400" dirty="0" err="1"/>
+              <a:t>Github</a:t>
+            </a:r>
+            <a:r>
+              <a:rPr lang="en-US" sz="2400" dirty="0"/>
+              <a:t> account name via Canvas</a:t>
+            </a:r>
+          </a:p>
+          <a:p>
+            <a:pPr marL="800100" lvl="1" indent="-342900">
+              <a:spcBef>
+                <a:spcPts val="1200"/>
+              </a:spcBef>
+              <a:buClr>
+                <a:schemeClr val="accent4">
+                  <a:lumMod val="60000"/>
+                  <a:lumOff val="40000"/>
+                </a:schemeClr>
+              </a:buClr>
+              <a:buSzPct val="75000"/>
+              <a:buFont typeface="Wingdings" pitchFamily="2" charset="2"/>
+              <a:buChar char="n"/>
+            </a:pPr>
+            <a:r>
+              <a:rPr lang="en-US" sz="2000"/>
+              <a:t>By </a:t>
+            </a:r>
+            <a:r>
+              <a:rPr lang="en-US" sz="2000" dirty="0">
+                <a:solidFill>
+                  <a:srgbClr val="0000FF"/>
+                </a:solidFill>
+              </a:rPr>
+              <a:t>27 Jan, 2pm</a:t>
+            </a:r>
+            <a:endParaRPr lang="en-US" sz="2000" dirty="0"/>
+          </a:p>
+          <a:p>
+            <a:pPr marL="800100" lvl="1" indent="-342900">
+              <a:spcBef>
+                <a:spcPts val="1200"/>
+              </a:spcBef>
+              <a:buClr>
+                <a:schemeClr val="accent4">
+                  <a:lumMod val="60000"/>
+                  <a:lumOff val="40000"/>
+                </a:schemeClr>
+              </a:buClr>
+              <a:buSzPct val="75000"/>
+              <a:buFont typeface="Wingdings" pitchFamily="2" charset="2"/>
+              <a:buChar char="n"/>
+            </a:pPr>
+            <a:endParaRPr lang="en-US" sz="2400" dirty="0"/>
+          </a:p>
+          <a:p>
+            <a:pPr marL="800100" lvl="1" indent="-342900">
+              <a:spcBef>
+                <a:spcPts val="1200"/>
+              </a:spcBef>
+              <a:buClr>
+                <a:schemeClr val="accent4">
+                  <a:lumMod val="60000"/>
+                  <a:lumOff val="40000"/>
+                </a:schemeClr>
+              </a:buClr>
+              <a:buSzPct val="75000"/>
+              <a:buFont typeface="Wingdings" pitchFamily="2" charset="2"/>
+              <a:buChar char="n"/>
+            </a:pPr>
+            <a:endParaRPr lang="en-US" sz="2400" dirty="0"/>
+          </a:p>
+          <a:p>
+            <a:pPr marL="800100" lvl="1" indent="-342900">
+              <a:spcBef>
+                <a:spcPts val="1200"/>
+              </a:spcBef>
+              <a:buClr>
+                <a:schemeClr val="accent4">
+                  <a:lumMod val="60000"/>
+                  <a:lumOff val="40000"/>
+                </a:schemeClr>
+              </a:buClr>
+              <a:buSzPct val="75000"/>
+              <a:buFont typeface="Wingdings" pitchFamily="2" charset="2"/>
+              <a:buChar char="n"/>
+            </a:pPr>
+            <a:endParaRPr lang="en-US" sz="2400" dirty="0"/>
           </a:p>
           <a:p>
             <a:pPr marL="342900" indent="-342900">
@@ -30659,7 +30821,7 @@
           <a:p>
             <a:pPr marL="342900" indent="-342900">
               <a:spcBef>
-                <a:spcPts val="600"/>
+                <a:spcPts val="1200"/>
               </a:spcBef>
               <a:buClr>
                 <a:schemeClr val="accent4">
@@ -30673,52 +30835,7 @@
             </a:pPr>
             <a:r>
               <a:rPr lang="en-US" sz="2400" dirty="0"/>
-              <a:t>Programming environment</a:t>
-            </a:r>
-          </a:p>
-          <a:p>
-            <a:pPr marL="342900" indent="-342900">
-              <a:spcBef>
-                <a:spcPts val="600"/>
-              </a:spcBef>
-              <a:buClr>
-                <a:schemeClr val="accent4">
-                  <a:lumMod val="60000"/>
-                  <a:lumOff val="40000"/>
-                </a:schemeClr>
-              </a:buClr>
-              <a:buSzPct val="75000"/>
-              <a:buFont typeface="Wingdings" pitchFamily="2" charset="2"/>
-              <a:buChar char="n"/>
-            </a:pPr>
-            <a:endParaRPr lang="en-US" sz="2400" dirty="0"/>
-          </a:p>
-          <a:p>
-            <a:pPr marL="342900" indent="-342900">
-              <a:spcBef>
-                <a:spcPts val="600"/>
-              </a:spcBef>
-              <a:buClr>
-                <a:schemeClr val="accent4">
-                  <a:lumMod val="60000"/>
-                  <a:lumOff val="40000"/>
-                </a:schemeClr>
-              </a:buClr>
-              <a:buSzPct val="75000"/>
-              <a:buFont typeface="Wingdings" pitchFamily="2" charset="2"/>
-              <a:buChar char="n"/>
-            </a:pPr>
-            <a:r>
-              <a:rPr lang="en-US" sz="2400" dirty="0"/>
-              <a:t>Submission of </a:t>
-            </a:r>
-            <a:r>
-              <a:rPr lang="en-US" sz="2400" dirty="0" err="1"/>
-              <a:t>Github</a:t>
-            </a:r>
-            <a:r>
-              <a:rPr lang="en-US" sz="2400" dirty="0"/>
-              <a:t> account name via Canvas</a:t>
+              <a:t>Exercise 0</a:t>
             </a:r>
           </a:p>
           <a:p>
@@ -30737,26 +30854,54 @@
               <a:buChar char="n"/>
             </a:pPr>
             <a:r>
-              <a:rPr lang="en-US" sz="2400" dirty="0"/>
-              <a:t>Due </a:t>
-            </a:r>
-            <a:r>
-              <a:rPr lang="en-US" sz="2400" dirty="0">
-                <a:solidFill>
-                  <a:srgbClr val="0000FF"/>
-                </a:solidFill>
-              </a:rPr>
-              <a:t>27 Jan, 2pm</a:t>
-            </a:r>
-            <a:r>
-              <a:rPr lang="en-US" sz="2400" dirty="0"/>
-              <a:t>.</a:t>
+              <a:rPr lang="en-US" sz="2000" dirty="0"/>
+              <a:t>Receive the skeleton files</a:t>
             </a:r>
           </a:p>
           <a:p>
             <a:pPr marL="800100" lvl="1" indent="-342900">
               <a:spcBef>
-                <a:spcPts val="600"/>
+                <a:spcPts val="1200"/>
+              </a:spcBef>
+              <a:buClr>
+                <a:schemeClr val="accent4">
+                  <a:lumMod val="60000"/>
+                  <a:lumOff val="40000"/>
+                </a:schemeClr>
+              </a:buClr>
+              <a:buSzPct val="75000"/>
+              <a:buFont typeface="Wingdings" pitchFamily="2" charset="2"/>
+              <a:buChar char="n"/>
+            </a:pPr>
+            <a:r>
+              <a:rPr lang="en-US" sz="2000" dirty="0"/>
+              <a:t>Analyze the problems and design the algorithms</a:t>
+            </a:r>
+          </a:p>
+          <a:p>
+            <a:pPr marL="800100" lvl="1" indent="-342900">
+              <a:spcBef>
+                <a:spcPts val="1200"/>
+              </a:spcBef>
+              <a:buClr>
+                <a:schemeClr val="accent4">
+                  <a:lumMod val="60000"/>
+                  <a:lumOff val="40000"/>
+                </a:schemeClr>
+              </a:buClr>
+              <a:buSzPct val="75000"/>
+              <a:buFont typeface="Wingdings" pitchFamily="2" charset="2"/>
+              <a:buChar char="n"/>
+            </a:pPr>
+            <a:r>
+              <a:rPr lang="en-US" sz="2000" dirty="0"/>
+              <a:t>No coding yet!</a:t>
+            </a:r>
+          </a:p>
+          <a:p>
+            <a:pPr marL="800100" lvl="1" indent="-342900">
+              <a:spcBef>
+                <a:spcPts val="1200"/>
               </a:spcBef>
               <a:buClr>
                 <a:schemeClr val="accent4">
@@ -30787,7 +30932,7 @@
             </a:pPr>
             <a:r>
               <a:rPr lang="en-US" sz="2400" dirty="0"/>
-              <a:t>Exercise 0</a:t>
+              <a:t>Tutorials</a:t>
             </a:r>
           </a:p>
           <a:p>
@@ -30806,8 +30951,8 @@
               <a:buChar char="n"/>
             </a:pPr>
             <a:r>
-              <a:rPr lang="en-US" sz="2400" dirty="0"/>
-              <a:t>Receive the skeleton files</a:t>
+              <a:rPr lang="en-US" sz="2000" dirty="0"/>
+              <a:t>From Week 3 onwards</a:t>
             </a:r>
           </a:p>
           <a:p>
@@ -30826,28 +30971,8 @@
               <a:buChar char="n"/>
             </a:pPr>
             <a:r>
-              <a:rPr lang="en-US" sz="2400" dirty="0"/>
-              <a:t>Analyze the problems and design the algorithms</a:t>
-            </a:r>
-          </a:p>
-          <a:p>
-            <a:pPr marL="800100" lvl="1" indent="-342900">
-              <a:spcBef>
-                <a:spcPts val="1200"/>
-              </a:spcBef>
-              <a:buClr>
-                <a:schemeClr val="accent4">
-                  <a:lumMod val="60000"/>
-                  <a:lumOff val="40000"/>
-                </a:schemeClr>
-              </a:buClr>
-              <a:buSzPct val="75000"/>
-              <a:buFont typeface="Wingdings" pitchFamily="2" charset="2"/>
-              <a:buChar char="n"/>
-            </a:pPr>
-            <a:r>
-              <a:rPr lang="en-US" sz="2400" dirty="0"/>
-              <a:t>No coding yet!</a:t>
+              <a:rPr lang="en-US" sz="2000" dirty="0"/>
+              <a:t>Attendance mark: 5% CA </a:t>
             </a:r>
           </a:p>
           <a:p>
